--- a/figures/GraphicalAbstract_v2.pptx
+++ b/figures/GraphicalAbstract_v2.pptx
@@ -115,9 +115,38 @@
 <file path=ppt/revisionInfo.xml><?xml version="1.0" encoding="utf-8"?>
 <p1510:revInfo xmlns:a="http://schemas.openxmlformats.org/drawingml/2006/main" xmlns:r="http://schemas.openxmlformats.org/officeDocument/2006/relationships" xmlns:p1510="http://schemas.microsoft.com/office/powerpoint/2015/10/main">
   <p1510:revLst>
-    <p1510:client id="{0955BA21-B41D-B842-9A2F-CBEA0AFCFE72}" v="3" dt="2025-10-30T17:48:51.670"/>
+    <p1510:client id="{B9DFDE3E-C7C5-0C4D-A524-92834D2FDB41}" v="1" dt="2025-11-24T21:02:59.829"/>
   </p1510:revLst>
 </p1510:revInfo>
+</file>
+
+<file path=ppt/changesInfos/changesInfo1.xml><?xml version="1.0" encoding="utf-8"?>
+<pc:chgInfo xmlns:a="http://schemas.openxmlformats.org/drawingml/2006/main" xmlns:r="http://schemas.openxmlformats.org/officeDocument/2006/relationships" xmlns:ac="http://schemas.microsoft.com/office/drawing/2013/main/command" xmlns:pc="http://schemas.microsoft.com/office/powerpoint/2013/main/command">
+  <pc:docChgLst>
+    <pc:chgData name="Luke Hillary" userId="23623241457_tp_box_2" providerId="OAuth2" clId="{C11E5D86-4096-5332-B9BF-B7A5F898B946}"/>
+    <pc:docChg chg="modSld">
+      <pc:chgData name="Luke Hillary" userId="23623241457_tp_box_2" providerId="OAuth2" clId="{C11E5D86-4096-5332-B9BF-B7A5F898B946}" dt="2025-11-24T21:03:03.158" v="1"/>
+      <pc:docMkLst>
+        <pc:docMk/>
+      </pc:docMkLst>
+      <pc:sldChg chg="modSp mod">
+        <pc:chgData name="Luke Hillary" userId="23623241457_tp_box_2" providerId="OAuth2" clId="{C11E5D86-4096-5332-B9BF-B7A5F898B946}" dt="2025-11-24T21:03:03.158" v="1"/>
+        <pc:sldMkLst>
+          <pc:docMk/>
+          <pc:sldMk cId="3310716200" sldId="256"/>
+        </pc:sldMkLst>
+        <pc:spChg chg="mod">
+          <ac:chgData name="Luke Hillary" userId="23623241457_tp_box_2" providerId="OAuth2" clId="{C11E5D86-4096-5332-B9BF-B7A5F898B946}" dt="2025-11-24T21:03:03.158" v="1"/>
+          <ac:spMkLst>
+            <pc:docMk/>
+            <pc:sldMk cId="3310716200" sldId="256"/>
+            <ac:spMk id="23" creationId="{43209FA6-E9EA-EAEE-9F4C-B177AC82F6A5}"/>
+          </ac:spMkLst>
+        </pc:spChg>
+      </pc:sldChg>
+    </pc:docChg>
+  </pc:docChgLst>
+</pc:chgInfo>
 </file>
 
 <file path=ppt/slideLayouts/slideLayout1.xml><?xml version="1.0" encoding="utf-8"?>
@@ -269,7 +298,7 @@
           <a:p>
             <a:fld id="{83CF39DF-27E3-4048-A998-7937A4A43163}" type="datetimeFigureOut">
               <a:rPr lang="en-US" smtClean="0"/>
-              <a:t>10/30/25</a:t>
+              <a:t>11/24/25</a:t>
             </a:fld>
             <a:endParaRPr lang="en-US"/>
           </a:p>
@@ -469,7 +498,7 @@
           <a:p>
             <a:fld id="{83CF39DF-27E3-4048-A998-7937A4A43163}" type="datetimeFigureOut">
               <a:rPr lang="en-US" smtClean="0"/>
-              <a:t>10/30/25</a:t>
+              <a:t>11/24/25</a:t>
             </a:fld>
             <a:endParaRPr lang="en-US"/>
           </a:p>
@@ -679,7 +708,7 @@
           <a:p>
             <a:fld id="{83CF39DF-27E3-4048-A998-7937A4A43163}" type="datetimeFigureOut">
               <a:rPr lang="en-US" smtClean="0"/>
-              <a:t>10/30/25</a:t>
+              <a:t>11/24/25</a:t>
             </a:fld>
             <a:endParaRPr lang="en-US"/>
           </a:p>
@@ -879,7 +908,7 @@
           <a:p>
             <a:fld id="{83CF39DF-27E3-4048-A998-7937A4A43163}" type="datetimeFigureOut">
               <a:rPr lang="en-US" smtClean="0"/>
-              <a:t>10/30/25</a:t>
+              <a:t>11/24/25</a:t>
             </a:fld>
             <a:endParaRPr lang="en-US"/>
           </a:p>
@@ -1155,7 +1184,7 @@
           <a:p>
             <a:fld id="{83CF39DF-27E3-4048-A998-7937A4A43163}" type="datetimeFigureOut">
               <a:rPr lang="en-US" smtClean="0"/>
-              <a:t>10/30/25</a:t>
+              <a:t>11/24/25</a:t>
             </a:fld>
             <a:endParaRPr lang="en-US"/>
           </a:p>
@@ -1423,7 +1452,7 @@
           <a:p>
             <a:fld id="{83CF39DF-27E3-4048-A998-7937A4A43163}" type="datetimeFigureOut">
               <a:rPr lang="en-US" smtClean="0"/>
-              <a:t>10/30/25</a:t>
+              <a:t>11/24/25</a:t>
             </a:fld>
             <a:endParaRPr lang="en-US"/>
           </a:p>
@@ -1838,7 +1867,7 @@
           <a:p>
             <a:fld id="{83CF39DF-27E3-4048-A998-7937A4A43163}" type="datetimeFigureOut">
               <a:rPr lang="en-US" smtClean="0"/>
-              <a:t>10/30/25</a:t>
+              <a:t>11/24/25</a:t>
             </a:fld>
             <a:endParaRPr lang="en-US"/>
           </a:p>
@@ -1980,7 +2009,7 @@
           <a:p>
             <a:fld id="{83CF39DF-27E3-4048-A998-7937A4A43163}" type="datetimeFigureOut">
               <a:rPr lang="en-US" smtClean="0"/>
-              <a:t>10/30/25</a:t>
+              <a:t>11/24/25</a:t>
             </a:fld>
             <a:endParaRPr lang="en-US"/>
           </a:p>
@@ -2093,7 +2122,7 @@
           <a:p>
             <a:fld id="{83CF39DF-27E3-4048-A998-7937A4A43163}" type="datetimeFigureOut">
               <a:rPr lang="en-US" smtClean="0"/>
-              <a:t>10/30/25</a:t>
+              <a:t>11/24/25</a:t>
             </a:fld>
             <a:endParaRPr lang="en-US"/>
           </a:p>
@@ -2406,7 +2435,7 @@
           <a:p>
             <a:fld id="{83CF39DF-27E3-4048-A998-7937A4A43163}" type="datetimeFigureOut">
               <a:rPr lang="en-US" smtClean="0"/>
-              <a:t>10/30/25</a:t>
+              <a:t>11/24/25</a:t>
             </a:fld>
             <a:endParaRPr lang="en-US"/>
           </a:p>
@@ -2695,7 +2724,7 @@
           <a:p>
             <a:fld id="{83CF39DF-27E3-4048-A998-7937A4A43163}" type="datetimeFigureOut">
               <a:rPr lang="en-US" smtClean="0"/>
-              <a:t>10/30/25</a:t>
+              <a:t>11/24/25</a:t>
             </a:fld>
             <a:endParaRPr lang="en-US"/>
           </a:p>
@@ -2938,7 +2967,7 @@
           <a:p>
             <a:fld id="{83CF39DF-27E3-4048-A998-7937A4A43163}" type="datetimeFigureOut">
               <a:rPr lang="en-US" smtClean="0"/>
-              <a:t>10/30/25</a:t>
+              <a:t>11/24/25</a:t>
             </a:fld>
             <a:endParaRPr lang="en-US"/>
           </a:p>
@@ -3853,15 +3882,9 @@
               <a:buNone/>
             </a:pPr>
             <a:r>
-              <a:rPr lang="en-US" sz="3200" b="1" dirty="0"/>
-              <a:t>Virome preparation method strongly influences interpretation of human gut viral communities</a:t>
-            </a:r>
-            <a:endParaRPr lang="en-GB" sz="3200" b="1" kern="0" dirty="0">
-              <a:effectLst/>
-              <a:latin typeface="Aptos" panose="020B0004020202020204" pitchFamily="34" charset="0"/>
-              <a:ea typeface="SimHei" panose="02010609060101010101" pitchFamily="49" charset="-122"/>
-              <a:cs typeface="Arial" panose="020B0604020202020204" pitchFamily="34" charset="0"/>
-            </a:endParaRPr>
+              <a:rPr lang="en-US" sz="3200" b="1"/>
+              <a:t>DNA extraction and virome processing methods strongly influence recovered human gut viral community characteristics</a:t>
+            </a:r>
           </a:p>
         </p:txBody>
       </p:sp>
